--- a/classes/parte-3-hacking-etico-y-pentesting-metodologia/074-meterpreter-y-post-explotacion/clase-074-presentacion.pptx
+++ b/classes/parte-3-hacking-etico-y-pentesting-metodologia/074-meterpreter-y-post-explotacion/clase-074-presentacion.pptx
@@ -17,6 +17,9 @@
     <p:sldId id="265" r:id="rId16"/>
     <p:sldId id="266" r:id="rId17"/>
     <p:sldId id="267" r:id="rId18"/>
+    <p:sldId id="268" r:id="rId19"/>
+    <p:sldId id="269" r:id="rId20"/>
+    <p:sldId id="270" r:id="rId21"/>
   </p:sldIdLst>
   <p:sldSz cx="9144000" cy="6858000" type="screen4x3"/>
   <p:notesSz cx="6858000" cy="9144000"/>
@@ -3198,7 +3201,7 @@
                   <a:srgbClr val="0B3D2E"/>
                 </a:solidFill>
               </a:rPr>
-              <a:t>⚠️ Errores comunes</a:t>
+              <a:t>✍️ Ejercicios</a:t>
             </a:r>
           </a:p>
         </p:txBody>
@@ -3236,97 +3239,97 @@
                   <a:srgbClr val="22282E"/>
                 </a:solidFill>
               </a:rPr>
-              <a:t>•  getsystem falla en todos los intentos — No existe una ruta de escalada conocida disponible; ejecutar localexploitsuggester para identificar alternativas</a:t>
-            </a:r>
-          </a:p>
-          <a:p>
-            <a:pPr>
-              <a:spcAft>
-                <a:spcPts val="600"/>
-              </a:spcAft>
-            </a:pPr>
-            <a:r>
-              <a:rPr sz="1500">
-                <a:solidFill>
-                  <a:srgbClr val="22282E"/>
-                </a:solidFill>
-              </a:rPr>
-              <a:t>•  hashdump devuelve "Insufficient privileges" — La sesión no corre como SYSTEM/root; intentar elevar primero con getsystem o un exploit local</a:t>
-            </a:r>
-          </a:p>
-          <a:p>
-            <a:pPr>
-              <a:spcAft>
-                <a:spcPts val="600"/>
-              </a:spcAft>
-            </a:pPr>
-            <a:r>
-              <a:rPr sz="1500">
-                <a:solidFill>
-                  <a:srgbClr val="22282E"/>
-                </a:solidFill>
-              </a:rPr>
-              <a:t>•  La sesión Meterpreter se cae al detener el servicio explotado — No se realizó migrate; migrar a un proceso estable apenas se obtiene la sesión</a:t>
-            </a:r>
-          </a:p>
-          <a:p>
-            <a:pPr>
-              <a:spcAft>
-                <a:spcPts val="600"/>
-              </a:spcAft>
-            </a:pPr>
-            <a:r>
-              <a:rPr sz="1500">
-                <a:solidFill>
-                  <a:srgbClr val="22282E"/>
-                </a:solidFill>
-              </a:rPr>
-              <a:t>•  load kiwi falla con error de arquitectura — El proceso migrado no coincide en arquitectura (x86 vs x64) con el payload cargado; migrar a un proceso de la arquitectura correcta</a:t>
-            </a:r>
-          </a:p>
-          <a:p>
-            <a:pPr>
-              <a:spcAft>
-                <a:spcPts val="600"/>
-              </a:spcAft>
-            </a:pPr>
-            <a:r>
-              <a:rPr sz="1500">
-                <a:solidFill>
-                  <a:srgbClr val="22282E"/>
-                </a:solidFill>
-              </a:rPr>
-              <a:t>•  No aparece nada en loot tras ejecutar un módulo post — El módulo no guarda loot por diseño, o guardó en notes; revisar ambos comandos desde msfconsole</a:t>
-            </a:r>
-          </a:p>
-          <a:p>
-            <a:pPr>
-              <a:spcAft>
-                <a:spcPts val="600"/>
-              </a:spcAft>
-            </a:pPr>
-            <a:r>
-              <a:rPr sz="1500">
-                <a:solidFill>
-                  <a:srgbClr val="22282E"/>
-                </a:solidFill>
-              </a:rPr>
-              <a:t>•  download falla con permisos denegados — El usuario actual no tiene acceso al archivo; intentar migrar a un proceso con más privilegios primero</a:t>
-            </a:r>
-          </a:p>
-          <a:p>
-            <a:pPr>
-              <a:spcAft>
-                <a:spcPts val="600"/>
-              </a:spcAft>
-            </a:pPr>
-            <a:r>
-              <a:rPr sz="1500">
-                <a:solidFill>
-                  <a:srgbClr val="22282E"/>
-                </a:solidFill>
-              </a:rPr>
-              <a:t>•  La sesión se vuelve inestable tras migrate — Se migró a un proceso de corta duración (ej. un notepad.exe recién abierto); elegir un proceso del sistema estable y de larga vida</a:t>
+              <a:t>•  Explica por qué Meterpreter es considerado más sigiloso que una shell de comandos tradicional.</a:t>
+            </a:r>
+          </a:p>
+          <a:p>
+            <a:pPr>
+              <a:spcAft>
+                <a:spcPts val="600"/>
+              </a:spcAft>
+            </a:pPr>
+            <a:r>
+              <a:rPr sz="1500">
+                <a:solidFill>
+                  <a:srgbClr val="22282E"/>
+                </a:solidFill>
+              </a:rPr>
+              <a:t>•  Migra la sesión a otro proceso y demuestra que sobrevive al cierre del proceso originalmente explotado.</a:t>
+            </a:r>
+          </a:p>
+          <a:p>
+            <a:pPr>
+              <a:spcAft>
+                <a:spcPts val="600"/>
+              </a:spcAft>
+            </a:pPr>
+            <a:r>
+              <a:rPr sz="1500">
+                <a:solidFill>
+                  <a:srgbClr val="22282E"/>
+                </a:solidFill>
+              </a:rPr>
+              <a:t>•  Ejecuta localexploitsuggester y elige una de las rutas de escalada sugeridas, explicando por qué aplicaría en ese sistema.</a:t>
+            </a:r>
+          </a:p>
+          <a:p>
+            <a:pPr>
+              <a:spcAft>
+                <a:spcPts val="600"/>
+              </a:spcAft>
+            </a:pPr>
+            <a:r>
+              <a:rPr sz="1500">
+                <a:solidFill>
+                  <a:srgbClr val="22282E"/>
+                </a:solidFill>
+              </a:rPr>
+              <a:t>•  Descarga un archivo del objetivo con download y verifica su integridad comparándolo en tu máquina Kali.</a:t>
+            </a:r>
+          </a:p>
+          <a:p>
+            <a:pPr>
+              <a:spcAft>
+                <a:spcPts val="600"/>
+              </a:spcAft>
+            </a:pPr>
+            <a:r>
+              <a:rPr sz="1500">
+                <a:solidFill>
+                  <a:srgbClr val="22282E"/>
+                </a:solidFill>
+              </a:rPr>
+              <a:t>•  Explica qué privilegios necesita específicamente hashdump para funcionar y qué ocurre si se ejecuta sin ellos.</a:t>
+            </a:r>
+          </a:p>
+          <a:p>
+            <a:pPr>
+              <a:spcAft>
+                <a:spcPts val="600"/>
+              </a:spcAft>
+            </a:pPr>
+            <a:r>
+              <a:rPr sz="1500">
+                <a:solidFill>
+                  <a:srgbClr val="22282E"/>
+                </a:solidFill>
+              </a:rPr>
+              <a:t>•  Documenta tres artefactos de loot distintos (por ejemplo, hash, archivo de configuración, captura de pantalla) que incluirías como evidencia en un informe real.</a:t>
+            </a:r>
+          </a:p>
+          <a:p>
+            <a:pPr>
+              <a:spcAft>
+                <a:spcPts val="600"/>
+              </a:spcAft>
+            </a:pPr>
+            <a:r>
+              <a:rPr sz="1500">
+                <a:solidFill>
+                  <a:srgbClr val="22282E"/>
+                </a:solidFill>
+              </a:rPr>
+              <a:t>•  Desde la perspectiva de un equipo de respuesta a incidentes, describe qué artefacto forense (proceso inyectado, conexión de red, clave de registro) permitiría detectar una sesión Meterpreter activa…</a:t>
             </a:r>
           </a:p>
         </p:txBody>
@@ -3377,7 +3380,7 @@
                   <a:srgbClr val="0B3D2E"/>
                 </a:solidFill>
               </a:rPr>
-              <a:t>❓ Preguntas frecuentes</a:t>
+              <a:t>📝 Reto verificable</a:t>
             </a:r>
           </a:p>
         </p:txBody>
@@ -3415,97 +3418,22 @@
                   <a:srgbClr val="22282E"/>
                 </a:solidFill>
               </a:rPr>
-              <a:t>•  ❓ ¿Meterpreter está siempre disponible tras cualquier exploit?</a:t>
-            </a:r>
-          </a:p>
-          <a:p>
-            <a:pPr>
-              <a:spcAft>
-                <a:spcPts val="600"/>
-              </a:spcAft>
-            </a:pPr>
-            <a:r>
-              <a:rPr sz="1500">
-                <a:solidFill>
-                  <a:srgbClr val="22282E"/>
-                </a:solidFill>
-              </a:rPr>
-              <a:t>•  No. Depende del exploit y de la plataforma objetivo. En Linux, en ocasiones solo se obtiene una shell de comandos simple, que puede intentar actualizarse a Meterpreter con sessions -u &lt;id&gt;.</a:t>
-            </a:r>
-          </a:p>
-          <a:p>
-            <a:pPr>
-              <a:spcAft>
-                <a:spcPts val="600"/>
-              </a:spcAft>
-            </a:pPr>
-            <a:r>
-              <a:rPr sz="1500">
-                <a:solidFill>
-                  <a:srgbClr val="22282E"/>
-                </a:solidFill>
-              </a:rPr>
-              <a:t>•  ❓ ¿Por qué es tan importante migrar de proceso?</a:t>
-            </a:r>
-          </a:p>
-          <a:p>
-            <a:pPr>
-              <a:spcAft>
-                <a:spcPts val="600"/>
-              </a:spcAft>
-            </a:pPr>
-            <a:r>
-              <a:rPr sz="1500">
-                <a:solidFill>
-                  <a:srgbClr val="22282E"/>
-                </a:solidFill>
-              </a:rPr>
-              <a:t>•  Porque el proceso explotado inicialmente puede cerrarse (perdiendo la sesión) o pertenecer a un contexto de poco valor. Migrar a un proceso estable como explorer.exe en Windows mantiene el acceso durante toda la evaluación.</a:t>
-            </a:r>
-          </a:p>
-          <a:p>
-            <a:pPr>
-              <a:spcAft>
-                <a:spcPts val="600"/>
-              </a:spcAft>
-            </a:pPr>
-            <a:r>
-              <a:rPr sz="1500">
-                <a:solidFill>
-                  <a:srgbClr val="22282E"/>
-                </a:solidFill>
-              </a:rPr>
-              <a:t>•  ❓ ¿getsystem es en sí mismo un exploit?</a:t>
-            </a:r>
-          </a:p>
-          <a:p>
-            <a:pPr>
-              <a:spcAft>
-                <a:spcPts val="600"/>
-              </a:spcAft>
-            </a:pPr>
-            <a:r>
-              <a:rPr sz="1500">
-                <a:solidFill>
-                  <a:srgbClr val="22282E"/>
-                </a:solidFill>
-              </a:rPr>
-              <a:t>•  No exactamente; usa varias técnicas conocidas de elevación local (impersonación de named pipes, duplicación de tokens) que funcionan solo si el sistema es susceptible a ellas. Si fallan, se requiere un exploit local específico sugerido por localexploitsuggester.</a:t>
-            </a:r>
-          </a:p>
-          <a:p>
-            <a:pPr>
-              <a:spcAft>
-                <a:spcPts val="600"/>
-              </a:spcAft>
-            </a:pPr>
-            <a:r>
-              <a:rPr sz="1500">
-                <a:solidFill>
-                  <a:srgbClr val="22282E"/>
-                </a:solidFill>
-              </a:rPr>
-              <a:t>•  ❓ ¿Cómo debo tratar las credenciales que extraigo durante un pentest real?</a:t>
+              <a:t>•  Reto: Desde una sesión Meterpreter activa en el laboratorio propio, recolectar evidencia verificable de impacto: información del sistema, al menos un archivo descargado, y, si el nivel de privilegio…</a:t>
+            </a:r>
+          </a:p>
+          <a:p>
+            <a:pPr>
+              <a:spcAft>
+                <a:spcPts val="600"/>
+              </a:spcAft>
+            </a:pPr>
+            <a:r>
+              <a:rPr sz="1500">
+                <a:solidFill>
+                  <a:srgbClr val="22282E"/>
+                </a:solidFill>
+              </a:rPr>
+              <a:t>•  Criterio de aceptación: se presenta la salida de sysinfo/getuid del objetivo, un archivo efectivamente descargado a la máquina atacante, y al menos una entrada visible en loot o creds dentro del…</a:t>
             </a:r>
           </a:p>
         </p:txBody>
@@ -3556,7 +3484,7 @@
                   <a:srgbClr val="0B3D2E"/>
                 </a:solidFill>
               </a:rPr>
-              <a:t>🔗 Referencias</a:t>
+              <a:t>⚠️ Errores comunes</a:t>
             </a:r>
           </a:p>
         </p:txBody>
@@ -3594,6 +3522,364 @@
                   <a:srgbClr val="22282E"/>
                 </a:solidFill>
               </a:rPr>
+              <a:t>•  getsystem falla en todos los intentos — No existe una ruta de escalada conocida disponible; ejecutar localexploitsuggester para identificar alternativas</a:t>
+            </a:r>
+          </a:p>
+          <a:p>
+            <a:pPr>
+              <a:spcAft>
+                <a:spcPts val="600"/>
+              </a:spcAft>
+            </a:pPr>
+            <a:r>
+              <a:rPr sz="1500">
+                <a:solidFill>
+                  <a:srgbClr val="22282E"/>
+                </a:solidFill>
+              </a:rPr>
+              <a:t>•  hashdump devuelve "Insufficient privileges" — La sesión no corre como SYSTEM/root; intentar elevar primero con getsystem o un exploit local</a:t>
+            </a:r>
+          </a:p>
+          <a:p>
+            <a:pPr>
+              <a:spcAft>
+                <a:spcPts val="600"/>
+              </a:spcAft>
+            </a:pPr>
+            <a:r>
+              <a:rPr sz="1500">
+                <a:solidFill>
+                  <a:srgbClr val="22282E"/>
+                </a:solidFill>
+              </a:rPr>
+              <a:t>•  La sesión Meterpreter se cae al detener el servicio explotado — No se realizó migrate; migrar a un proceso estable apenas se obtiene la sesión</a:t>
+            </a:r>
+          </a:p>
+          <a:p>
+            <a:pPr>
+              <a:spcAft>
+                <a:spcPts val="600"/>
+              </a:spcAft>
+            </a:pPr>
+            <a:r>
+              <a:rPr sz="1500">
+                <a:solidFill>
+                  <a:srgbClr val="22282E"/>
+                </a:solidFill>
+              </a:rPr>
+              <a:t>•  load kiwi falla con error de arquitectura — El proceso migrado no coincide en arquitectura (x86 vs x64) con el payload cargado; migrar a un proceso de la arquitectura correcta</a:t>
+            </a:r>
+          </a:p>
+          <a:p>
+            <a:pPr>
+              <a:spcAft>
+                <a:spcPts val="600"/>
+              </a:spcAft>
+            </a:pPr>
+            <a:r>
+              <a:rPr sz="1500">
+                <a:solidFill>
+                  <a:srgbClr val="22282E"/>
+                </a:solidFill>
+              </a:rPr>
+              <a:t>•  No aparece nada en loot tras ejecutar un módulo post — El módulo no guarda loot por diseño, o guardó en notes; revisar ambos comandos desde msfconsole</a:t>
+            </a:r>
+          </a:p>
+          <a:p>
+            <a:pPr>
+              <a:spcAft>
+                <a:spcPts val="600"/>
+              </a:spcAft>
+            </a:pPr>
+            <a:r>
+              <a:rPr sz="1500">
+                <a:solidFill>
+                  <a:srgbClr val="22282E"/>
+                </a:solidFill>
+              </a:rPr>
+              <a:t>•  download falla con permisos denegados — El usuario actual no tiene acceso al archivo; intentar migrar a un proceso con más privilegios primero</a:t>
+            </a:r>
+          </a:p>
+          <a:p>
+            <a:pPr>
+              <a:spcAft>
+                <a:spcPts val="600"/>
+              </a:spcAft>
+            </a:pPr>
+            <a:r>
+              <a:rPr sz="1500">
+                <a:solidFill>
+                  <a:srgbClr val="22282E"/>
+                </a:solidFill>
+              </a:rPr>
+              <a:t>•  La sesión se vuelve inestable tras migrate — Se migró a un proceso de corta duración (ej. un notepad.exe recién abierto); elegir un proceso del sistema estable y de larga vida</a:t>
+            </a:r>
+          </a:p>
+        </p:txBody>
+      </p:sp>
+    </p:spTree>
+  </p:cSld>
+  <p:clrMapOvr>
+    <a:masterClrMapping/>
+  </p:clrMapOvr>
+</p:sld>
+</file>
+
+<file path=ppt/slides/slide13.xml><?xml version="1.0" encoding="utf-8"?>
+<p:sld xmlns:a="http://schemas.openxmlformats.org/drawingml/2006/main" xmlns:p="http://schemas.openxmlformats.org/presentationml/2006/main" xmlns:r="http://schemas.openxmlformats.org/officeDocument/2006/relationships">
+  <p:cSld>
+    <p:spTree>
+      <p:nvGrpSpPr>
+        <p:cNvPr id="1" name=""/>
+        <p:cNvGrpSpPr/>
+        <p:nvPr/>
+      </p:nvGrpSpPr>
+      <p:grpSpPr/>
+      <p:sp>
+        <p:nvSpPr>
+          <p:cNvPr id="2" name="TextBox 1"/>
+          <p:cNvSpPr txBox="1"/>
+          <p:nvPr/>
+        </p:nvSpPr>
+        <p:spPr>
+          <a:xfrm>
+            <a:off x="457200" y="320040"/>
+            <a:ext cx="8229600" cy="822960"/>
+          </a:xfrm>
+          <a:prstGeom prst="rect">
+            <a:avLst/>
+          </a:prstGeom>
+          <a:noFill/>
+        </p:spPr>
+        <p:txBody>
+          <a:bodyPr wrap="square">
+            <a:spAutoFit/>
+          </a:bodyPr>
+          <a:lstStyle/>
+          <a:p>
+            <a:r>
+              <a:rPr sz="2600" b="1">
+                <a:solidFill>
+                  <a:srgbClr val="0B3D2E"/>
+                </a:solidFill>
+              </a:rPr>
+              <a:t>❓ Preguntas frecuentes</a:t>
+            </a:r>
+          </a:p>
+        </p:txBody>
+      </p:sp>
+      <p:sp>
+        <p:nvSpPr>
+          <p:cNvPr id="3" name="TextBox 2"/>
+          <p:cNvSpPr txBox="1"/>
+          <p:nvPr/>
+        </p:nvSpPr>
+        <p:spPr>
+          <a:xfrm>
+            <a:off x="457200" y="1280160"/>
+            <a:ext cx="8229600" cy="4937760"/>
+          </a:xfrm>
+          <a:prstGeom prst="rect">
+            <a:avLst/>
+          </a:prstGeom>
+          <a:noFill/>
+        </p:spPr>
+        <p:txBody>
+          <a:bodyPr wrap="square">
+            <a:spAutoFit/>
+          </a:bodyPr>
+          <a:lstStyle/>
+          <a:p>
+            <a:pPr>
+              <a:spcAft>
+                <a:spcPts val="600"/>
+              </a:spcAft>
+            </a:pPr>
+            <a:r>
+              <a:rPr sz="1500">
+                <a:solidFill>
+                  <a:srgbClr val="22282E"/>
+                </a:solidFill>
+              </a:rPr>
+              <a:t>•  ❓ ¿Meterpreter está siempre disponible tras cualquier exploit?</a:t>
+            </a:r>
+          </a:p>
+          <a:p>
+            <a:pPr>
+              <a:spcAft>
+                <a:spcPts val="600"/>
+              </a:spcAft>
+            </a:pPr>
+            <a:r>
+              <a:rPr sz="1500">
+                <a:solidFill>
+                  <a:srgbClr val="22282E"/>
+                </a:solidFill>
+              </a:rPr>
+              <a:t>•  No. Depende del exploit y de la plataforma objetivo. En Linux, en ocasiones solo se obtiene una shell de comandos simple, que puede intentar actualizarse a Meterpreter con sessions -u &lt;id&gt;.</a:t>
+            </a:r>
+          </a:p>
+          <a:p>
+            <a:pPr>
+              <a:spcAft>
+                <a:spcPts val="600"/>
+              </a:spcAft>
+            </a:pPr>
+            <a:r>
+              <a:rPr sz="1500">
+                <a:solidFill>
+                  <a:srgbClr val="22282E"/>
+                </a:solidFill>
+              </a:rPr>
+              <a:t>•  ❓ ¿Por qué es tan importante migrar de proceso?</a:t>
+            </a:r>
+          </a:p>
+          <a:p>
+            <a:pPr>
+              <a:spcAft>
+                <a:spcPts val="600"/>
+              </a:spcAft>
+            </a:pPr>
+            <a:r>
+              <a:rPr sz="1500">
+                <a:solidFill>
+                  <a:srgbClr val="22282E"/>
+                </a:solidFill>
+              </a:rPr>
+              <a:t>•  Porque el proceso explotado inicialmente puede cerrarse (perdiendo la sesión) o pertenecer a un contexto de poco valor. Migrar a un proceso estable como explorer.exe en Windows mantiene el acceso…</a:t>
+            </a:r>
+          </a:p>
+          <a:p>
+            <a:pPr>
+              <a:spcAft>
+                <a:spcPts val="600"/>
+              </a:spcAft>
+            </a:pPr>
+            <a:r>
+              <a:rPr sz="1500">
+                <a:solidFill>
+                  <a:srgbClr val="22282E"/>
+                </a:solidFill>
+              </a:rPr>
+              <a:t>•  ❓ ¿getsystem es en sí mismo un exploit?</a:t>
+            </a:r>
+          </a:p>
+          <a:p>
+            <a:pPr>
+              <a:spcAft>
+                <a:spcPts val="600"/>
+              </a:spcAft>
+            </a:pPr>
+            <a:r>
+              <a:rPr sz="1500">
+                <a:solidFill>
+                  <a:srgbClr val="22282E"/>
+                </a:solidFill>
+              </a:rPr>
+              <a:t>•  No exactamente; usa varias técnicas conocidas de elevación local (impersonación de named pipes, duplicación de tokens) que funcionan solo si el sistema es susceptible a ellas. Si fallan, se requiere…</a:t>
+            </a:r>
+          </a:p>
+          <a:p>
+            <a:pPr>
+              <a:spcAft>
+                <a:spcPts val="600"/>
+              </a:spcAft>
+            </a:pPr>
+            <a:r>
+              <a:rPr sz="1500">
+                <a:solidFill>
+                  <a:srgbClr val="22282E"/>
+                </a:solidFill>
+              </a:rPr>
+              <a:t>•  ❓ ¿Cómo debo tratar las credenciales que extraigo durante un pentest real?</a:t>
+            </a:r>
+          </a:p>
+        </p:txBody>
+      </p:sp>
+    </p:spTree>
+  </p:cSld>
+  <p:clrMapOvr>
+    <a:masterClrMapping/>
+  </p:clrMapOvr>
+</p:sld>
+</file>
+
+<file path=ppt/slides/slide14.xml><?xml version="1.0" encoding="utf-8"?>
+<p:sld xmlns:a="http://schemas.openxmlformats.org/drawingml/2006/main" xmlns:p="http://schemas.openxmlformats.org/presentationml/2006/main" xmlns:r="http://schemas.openxmlformats.org/officeDocument/2006/relationships">
+  <p:cSld>
+    <p:spTree>
+      <p:nvGrpSpPr>
+        <p:cNvPr id="1" name=""/>
+        <p:cNvGrpSpPr/>
+        <p:nvPr/>
+      </p:nvGrpSpPr>
+      <p:grpSpPr/>
+      <p:sp>
+        <p:nvSpPr>
+          <p:cNvPr id="2" name="TextBox 1"/>
+          <p:cNvSpPr txBox="1"/>
+          <p:nvPr/>
+        </p:nvSpPr>
+        <p:spPr>
+          <a:xfrm>
+            <a:off x="457200" y="320040"/>
+            <a:ext cx="8229600" cy="822960"/>
+          </a:xfrm>
+          <a:prstGeom prst="rect">
+            <a:avLst/>
+          </a:prstGeom>
+          <a:noFill/>
+        </p:spPr>
+        <p:txBody>
+          <a:bodyPr wrap="square">
+            <a:spAutoFit/>
+          </a:bodyPr>
+          <a:lstStyle/>
+          <a:p>
+            <a:r>
+              <a:rPr sz="2600" b="1">
+                <a:solidFill>
+                  <a:srgbClr val="0B3D2E"/>
+                </a:solidFill>
+              </a:rPr>
+              <a:t>🔗 Referencias</a:t>
+            </a:r>
+          </a:p>
+        </p:txBody>
+      </p:sp>
+      <p:sp>
+        <p:nvSpPr>
+          <p:cNvPr id="3" name="TextBox 2"/>
+          <p:cNvSpPr txBox="1"/>
+          <p:nvPr/>
+        </p:nvSpPr>
+        <p:spPr>
+          <a:xfrm>
+            <a:off x="457200" y="1280160"/>
+            <a:ext cx="8229600" cy="4937760"/>
+          </a:xfrm>
+          <a:prstGeom prst="rect">
+            <a:avLst/>
+          </a:prstGeom>
+          <a:noFill/>
+        </p:spPr>
+        <p:txBody>
+          <a:bodyPr wrap="square">
+            <a:spAutoFit/>
+          </a:bodyPr>
+          <a:lstStyle/>
+          <a:p>
+            <a:pPr>
+              <a:spcAft>
+                <a:spcPts val="600"/>
+              </a:spcAft>
+            </a:pPr>
+            <a:r>
+              <a:rPr sz="1500">
+                <a:solidFill>
+                  <a:srgbClr val="22282E"/>
+                </a:solidFill>
+              </a:rPr>
               <a:t>•  Kennedy, D. et al. "Metasploit: The Penetration Tester's Guide" (No Starch Press) — capítulo dedicado a Meterpreter y post-explotación.</a:t>
             </a:r>
           </a:p>
@@ -3689,6 +3975,81 @@
           </a:p>
         </p:txBody>
       </p:sp>
+    </p:spTree>
+  </p:cSld>
+  <p:clrMapOvr>
+    <a:masterClrMapping/>
+  </p:clrMapOvr>
+</p:sld>
+</file>
+
+<file path=ppt/slides/slide15.xml><?xml version="1.0" encoding="utf-8"?>
+<p:sld xmlns:a="http://schemas.openxmlformats.org/drawingml/2006/main" xmlns:p="http://schemas.openxmlformats.org/presentationml/2006/main" xmlns:r="http://schemas.openxmlformats.org/officeDocument/2006/relationships">
+  <p:cSld>
+    <p:spTree>
+      <p:nvGrpSpPr>
+        <p:cNvPr id="1" name=""/>
+        <p:cNvGrpSpPr/>
+        <p:nvPr/>
+      </p:nvGrpSpPr>
+      <p:grpSpPr/>
+      <p:sp>
+        <p:nvSpPr>
+          <p:cNvPr id="2" name="TextBox 1"/>
+          <p:cNvSpPr txBox="1"/>
+          <p:nvPr/>
+        </p:nvSpPr>
+        <p:spPr>
+          <a:xfrm>
+            <a:off x="457200" y="274320"/>
+            <a:ext cx="8229600" cy="640080"/>
+          </a:xfrm>
+          <a:prstGeom prst="rect">
+            <a:avLst/>
+          </a:prstGeom>
+          <a:noFill/>
+        </p:spPr>
+        <p:txBody>
+          <a:bodyPr wrap="square">
+            <a:spAutoFit/>
+          </a:bodyPr>
+          <a:lstStyle/>
+          <a:p>
+            <a:r>
+              <a:rPr sz="2200" b="1">
+                <a:solidFill>
+                  <a:srgbClr val="0B3D2E"/>
+                </a:solidFill>
+              </a:rPr>
+              <a:t>Diagrama de la clase</a:t>
+            </a:r>
+          </a:p>
+        </p:txBody>
+      </p:sp>
+      <p:pic>
+        <p:nvPicPr>
+          <p:cNvPr id="3" name="Picture 2" descr="8f1153406a094c6b.png"/>
+          <p:cNvPicPr>
+            <a:picLocks noChangeAspect="1"/>
+          </p:cNvPicPr>
+          <p:nvPr/>
+        </p:nvPicPr>
+        <p:blipFill>
+          <a:blip r:embed="rId2"/>
+          <a:stretch>
+            <a:fillRect/>
+          </a:stretch>
+        </p:blipFill>
+        <p:spPr>
+          <a:xfrm>
+            <a:off x="2607485" y="1097280"/>
+            <a:ext cx="3929029" cy="5303520"/>
+          </a:xfrm>
+          <a:prstGeom prst="rect">
+            <a:avLst/>
+          </a:prstGeom>
+        </p:spPr>
+      </p:pic>
     </p:spTree>
   </p:cSld>
   <p:clrMapOvr>
@@ -3773,7 +4134,7 @@
                   <a:srgbClr val="22282E"/>
                 </a:solidFill>
               </a:rPr>
-              <a:t>•  El alumno dominará Meterpreter, el payload avanzado de Metasploit que se ejecuta en memoria, y las tareas fundamentales de post-explotación: reconocimiento del sistema comprometido, migración de proceso, recolección de credenciales y uso de módulos post para automatizar enumeración interna. La post-explotación es la fase donde se demuestra el impacto real de una vulnerabilidad ante un cliente o evaluador.</a:t>
+              <a:t>•  El alumno dominará Meterpreter, el payload avanzado de Metasploit que se ejecuta en memoria, y las tareas fundamentales de post-explotación: reconocimiento del sistema comprometido, migración de…</a:t>
             </a:r>
           </a:p>
         </p:txBody>
@@ -4182,7 +4543,7 @@
                   <a:srgbClr val="0B3D2E"/>
                 </a:solidFill>
               </a:rPr>
-              <a:t>📖 Definiciones y características</a:t>
+              <a:t>🧠 Explicación en profundidad</a:t>
             </a:r>
           </a:p>
         </p:txBody>
@@ -4220,82 +4581,97 @@
                   <a:srgbClr val="22282E"/>
                 </a:solidFill>
               </a:rPr>
-              <a:t>•  Meterpreter: payload avanzado que se inyecta en memoria y expone un intérprete de comandos extensible mediante extensiones (stdapi, priv, kiwi). Característica clave: no escribe en disco por defecto, lo que dificulta su detección por antivirus tradicionales basados en archivos.</a:t>
-            </a:r>
-          </a:p>
-          <a:p>
-            <a:pPr>
-              <a:spcAft>
-                <a:spcPts val="600"/>
-              </a:spcAft>
-            </a:pPr>
-            <a:r>
-              <a:rPr sz="1500">
-                <a:solidFill>
-                  <a:srgbClr val="22282E"/>
-                </a:solidFill>
-              </a:rPr>
-              <a:t>•  migrate: comando que mueve la sesión de Meterpreter a otro proceso en ejecución. Característica clave: aporta estabilidad y en ocasiones permite heredar el contexto de privilegios de un proceso más privilegiado.</a:t>
-            </a:r>
-          </a:p>
-          <a:p>
-            <a:pPr>
-              <a:spcAft>
-                <a:spcPts val="600"/>
-              </a:spcAft>
-            </a:pPr>
-            <a:r>
-              <a:rPr sz="1500">
-                <a:solidFill>
-                  <a:srgbClr val="22282E"/>
-                </a:solidFill>
-              </a:rPr>
-              <a:t>•  hashdump: comando que vuelca los hashes de contraseñas almacenados localmente (SAM en Windows, /etc/shadow equivalente en Linux vía módulos). Característica clave: requiere privilegios elevados (SYSTEM o root) para ejecutarse con éxito.</a:t>
-            </a:r>
-          </a:p>
-          <a:p>
-            <a:pPr>
-              <a:spcAft>
-                <a:spcPts val="600"/>
-              </a:spcAft>
-            </a:pPr>
-            <a:r>
-              <a:rPr sz="1500">
-                <a:solidFill>
-                  <a:srgbClr val="22282E"/>
-                </a:solidFill>
-              </a:rPr>
-              <a:t>•  kiwi (integración de Mimikatz): extensión de Meterpreter que extrae credenciales en texto claro y tickets Kerberos de la memoria de procesos Windows. Característica clave: solo funciona si la arquitectura del proceso migrado coincide con la del payload cargado.</a:t>
-            </a:r>
-          </a:p>
-          <a:p>
-            <a:pPr>
-              <a:spcAft>
-                <a:spcPts val="600"/>
-              </a:spcAft>
-            </a:pPr>
-            <a:r>
-              <a:rPr sz="1500">
-                <a:solidFill>
-                  <a:srgbClr val="22282E"/>
-                </a:solidFill>
-              </a:rPr>
-              <a:t>•  Módulo post: script que se ejecuta sobre una sesión ya establecida para automatizar tareas de post-explotación. Característica clave: post/multi/recon/localexploitsuggester analiza el sistema y sugiere rutas de escalada de privilegios conocidas.</a:t>
-            </a:r>
-          </a:p>
-          <a:p>
-            <a:pPr>
-              <a:spcAft>
-                <a:spcPts val="600"/>
-              </a:spcAft>
-            </a:pPr>
-            <a:r>
-              <a:rPr sz="1500">
-                <a:solidFill>
-                  <a:srgbClr val="22282E"/>
-                </a:solidFill>
-              </a:rPr>
-              <a:t>•  Loot: conjunto de datos extraídos del objetivo (hashes, archivos, capturas de pantalla) almacenados y catalogados por Metasploit. Característica clave: queda registrado en la base de datos del workspace y sirve como evidencia verificable para el informe final.</a:t>
+              <a:t>•  Conseguir una shell es donde muchos aficionados celebran y donde el pentester profesional</a:t>
+            </a:r>
+          </a:p>
+          <a:p>
+            <a:pPr>
+              <a:spcAft>
+                <a:spcPts val="600"/>
+              </a:spcAft>
+            </a:pPr>
+            <a:r>
+              <a:rPr sz="1500">
+                <a:solidFill>
+                  <a:srgbClr val="22282E"/>
+                </a:solidFill>
+              </a:rPr>
+              <a:t>•  empieza. El objetivo de un pentest no es "entrar", sino demostrar hasta dónde puede</a:t>
+            </a:r>
+          </a:p>
+          <a:p>
+            <a:pPr>
+              <a:spcAft>
+                <a:spcPts val="600"/>
+              </a:spcAft>
+            </a:pPr>
+            <a:r>
+              <a:rPr sz="1500">
+                <a:solidFill>
+                  <a:srgbClr val="22282E"/>
+                </a:solidFill>
+              </a:rPr>
+              <a:t>•  llegar un atacante y qué impacto real tendría: qué datos, qué privilegios, qué alcance en la</a:t>
+            </a:r>
+          </a:p>
+          <a:p>
+            <a:pPr>
+              <a:spcAft>
+                <a:spcPts val="600"/>
+              </a:spcAft>
+            </a:pPr>
+            <a:r>
+              <a:rPr sz="1500">
+                <a:solidFill>
+                  <a:srgbClr val="22282E"/>
+                </a:solidFill>
+              </a:rPr>
+              <a:t>•  red. Esa es la fase de post-explotación, y Meterpreter es la herramienta con la que</a:t>
+            </a:r>
+          </a:p>
+          <a:p>
+            <a:pPr>
+              <a:spcAft>
+                <a:spcPts val="600"/>
+              </a:spcAft>
+            </a:pPr>
+            <a:r>
+              <a:rPr sz="1500">
+                <a:solidFill>
+                  <a:srgbClr val="22282E"/>
+                </a:solidFill>
+              </a:rPr>
+              <a:t>•  Metasploit la ejecuta.</a:t>
+            </a:r>
+          </a:p>
+          <a:p>
+            <a:pPr>
+              <a:spcAft>
+                <a:spcPts val="600"/>
+              </a:spcAft>
+            </a:pPr>
+            <a:r>
+              <a:rPr sz="1500">
+                <a:solidFill>
+                  <a:srgbClr val="22282E"/>
+                </a:solidFill>
+              </a:rPr>
+              <a:t>•  Meterpreter es un payload avanzado con una propiedad que define su valor: se ejecuta</a:t>
+            </a:r>
+          </a:p>
+          <a:p>
+            <a:pPr>
+              <a:spcAft>
+                <a:spcPts val="600"/>
+              </a:spcAft>
+            </a:pPr>
+            <a:r>
+              <a:rPr sz="1500">
+                <a:solidFill>
+                  <a:srgbClr val="22282E"/>
+                </a:solidFill>
+              </a:rPr>
+              <a:t>•  enteramente en memoria y no escribe en disco por defecto, inyectándose en el espacio de un</a:t>
             </a:r>
           </a:p>
         </p:txBody>
@@ -4346,7 +4722,7 @@
                   <a:srgbClr val="0B3D2E"/>
                 </a:solidFill>
               </a:rPr>
-              <a:t>🧰 Herramientas y preparación</a:t>
+              <a:t>📖 Definiciones y características</a:t>
             </a:r>
           </a:p>
         </p:txBody>
@@ -4384,37 +4760,82 @@
                   <a:srgbClr val="22282E"/>
                 </a:solidFill>
               </a:rPr>
-              <a:t>•  Una sesión de Meterpreter activa, obtenida en la clase anterior contra Metasploitable2/3 o, idealmente, contra una VM Windows de laboratorio propia con un servicio deliberadamente vulnerable (para poder practicar hashdump y kiwi, que son específicos de Windows).</a:t>
-            </a:r>
-          </a:p>
-          <a:p>
-            <a:pPr>
-              <a:spcAft>
-                <a:spcPts val="600"/>
-              </a:spcAft>
-            </a:pPr>
-            <a:r>
-              <a:rPr sz="1500">
-                <a:solidFill>
-                  <a:srgbClr val="22282E"/>
-                </a:solidFill>
-              </a:rPr>
-              <a:t>•  Confirmar que la sesión sigue activa con sessions -l antes de iniciar el laboratorio.</a:t>
-            </a:r>
-          </a:p>
-          <a:p>
-            <a:pPr>
-              <a:spcAft>
-                <a:spcPts val="600"/>
-              </a:spcAft>
-            </a:pPr>
-            <a:r>
-              <a:rPr sz="1500">
-                <a:solidFill>
-                  <a:srgbClr val="22282E"/>
-                </a:solidFill>
-              </a:rPr>
-              <a:t>•  Espacio en disco local (loot/) para almacenar los archivos descargados durante la práctica.</a:t>
+              <a:t>•  Meterpreter: payload avanzado que se inyecta en memoria y expone un intérprete de comandos extensible mediante extensiones (stdapi, priv, kiwi). Característica clave: no escribe en disco por defecto…</a:t>
+            </a:r>
+          </a:p>
+          <a:p>
+            <a:pPr>
+              <a:spcAft>
+                <a:spcPts val="600"/>
+              </a:spcAft>
+            </a:pPr>
+            <a:r>
+              <a:rPr sz="1500">
+                <a:solidFill>
+                  <a:srgbClr val="22282E"/>
+                </a:solidFill>
+              </a:rPr>
+              <a:t>•  migrate: comando que mueve la sesión de Meterpreter a otro proceso en ejecución. Característica clave: aporta estabilidad y en ocasiones permite heredar el contexto de privilegios de un proceso más…</a:t>
+            </a:r>
+          </a:p>
+          <a:p>
+            <a:pPr>
+              <a:spcAft>
+                <a:spcPts val="600"/>
+              </a:spcAft>
+            </a:pPr>
+            <a:r>
+              <a:rPr sz="1500">
+                <a:solidFill>
+                  <a:srgbClr val="22282E"/>
+                </a:solidFill>
+              </a:rPr>
+              <a:t>•  hashdump: comando que vuelca los hashes de contraseñas almacenados localmente (SAM en Windows, /etc/shadow equivalente en Linux vía módulos). Característica clave: requiere privilegios elevados…</a:t>
+            </a:r>
+          </a:p>
+          <a:p>
+            <a:pPr>
+              <a:spcAft>
+                <a:spcPts val="600"/>
+              </a:spcAft>
+            </a:pPr>
+            <a:r>
+              <a:rPr sz="1500">
+                <a:solidFill>
+                  <a:srgbClr val="22282E"/>
+                </a:solidFill>
+              </a:rPr>
+              <a:t>•  kiwi (integración de Mimikatz): extensión de Meterpreter que extrae credenciales en texto claro y tickets Kerberos de la memoria de procesos Windows. Característica clave: solo funciona si la…</a:t>
+            </a:r>
+          </a:p>
+          <a:p>
+            <a:pPr>
+              <a:spcAft>
+                <a:spcPts val="600"/>
+              </a:spcAft>
+            </a:pPr>
+            <a:r>
+              <a:rPr sz="1500">
+                <a:solidFill>
+                  <a:srgbClr val="22282E"/>
+                </a:solidFill>
+              </a:rPr>
+              <a:t>•  Módulo post: script que se ejecuta sobre una sesión ya establecida para automatizar tareas de post-explotación. Característica clave: post/multi/recon/localexploitsuggester analiza el sistema y…</a:t>
+            </a:r>
+          </a:p>
+          <a:p>
+            <a:pPr>
+              <a:spcAft>
+                <a:spcPts val="600"/>
+              </a:spcAft>
+            </a:pPr>
+            <a:r>
+              <a:rPr sz="1500">
+                <a:solidFill>
+                  <a:srgbClr val="22282E"/>
+                </a:solidFill>
+              </a:rPr>
+              <a:t>•  Loot: conjunto de datos extraídos del objetivo (hashes, archivos, capturas de pantalla) almacenados y catalogados por Metasploit. Característica clave: queda registrado en la base de datos del…</a:t>
             </a:r>
           </a:p>
         </p:txBody>
@@ -4465,7 +4886,7 @@
                   <a:srgbClr val="0B3D2E"/>
                 </a:solidFill>
               </a:rPr>
-              <a:t>🧪 Laboratorio guiado</a:t>
+              <a:t>📔 Glosario</a:t>
             </a:r>
           </a:p>
         </p:txBody>
@@ -4503,97 +4924,97 @@
                   <a:srgbClr val="22282E"/>
                 </a:solidFill>
               </a:rPr>
-              <a:t>•  Con una sesión Meterpreter activa (confirmada con sessions -i 1):</a:t>
-            </a:r>
-          </a:p>
-          <a:p>
-            <a:pPr>
-              <a:spcAft>
-                <a:spcPts val="600"/>
-              </a:spcAft>
-            </a:pPr>
-            <a:r>
-              <a:rPr sz="1500">
-                <a:solidFill>
-                  <a:srgbClr val="22282E"/>
-                </a:solidFill>
-              </a:rPr>
-              <a:t>•  Reconoce el sistema comprometido: sysinfo, getuid, ps.</a:t>
-            </a:r>
-          </a:p>
-          <a:p>
-            <a:pPr>
-              <a:spcAft>
-                <a:spcPts val="600"/>
-              </a:spcAft>
-            </a:pPr>
-            <a:r>
-              <a:rPr sz="1500">
-                <a:solidFill>
-                  <a:srgbClr val="22282E"/>
-                </a:solidFill>
-              </a:rPr>
-              <a:t>•  Explora el sistema de archivos remoto: pwd, ls, y descarga un archivo de interés: download /etc/passwd loot/passwd (o su equivalente en Windows).</a:t>
-            </a:r>
-          </a:p>
-          <a:p>
-            <a:pPr>
-              <a:spcAft>
-                <a:spcPts val="600"/>
-              </a:spcAft>
-            </a:pPr>
-            <a:r>
-              <a:rPr sz="1500">
-                <a:solidFill>
-                  <a:srgbClr val="22282E"/>
-                </a:solidFill>
-              </a:rPr>
-              <a:t>•  Migra la sesión a un proceso más estable para evitar perderla si el servicio original se cierra: migrate -N explorer.exe (Windows) o al PID de un proceso persistente en Linux.</a:t>
-            </a:r>
-          </a:p>
-          <a:p>
-            <a:pPr>
-              <a:spcAft>
-                <a:spcPts val="600"/>
-              </a:spcAft>
-            </a:pPr>
-            <a:r>
-              <a:rPr sz="1500">
-                <a:solidFill>
-                  <a:srgbClr val="22282E"/>
-                </a:solidFill>
-              </a:rPr>
-              <a:t>•  Ejecuta un módulo post de reconocimiento desde msfconsole (con la sesión en background, background primero): run post/multi/recon/localexploitsuggester.</a:t>
-            </a:r>
-          </a:p>
-          <a:p>
-            <a:pPr>
-              <a:spcAft>
-                <a:spcPts val="600"/>
-              </a:spcAft>
-            </a:pPr>
-            <a:r>
-              <a:rPr sz="1500">
-                <a:solidFill>
-                  <a:srgbClr val="22282E"/>
-                </a:solidFill>
-              </a:rPr>
-              <a:t>•  Ejecuta un módulo post de enumeración de usuarios conectados (Windows): run post/windows/gather/enumloggedonusers.</a:t>
-            </a:r>
-          </a:p>
-          <a:p>
-            <a:pPr>
-              <a:spcAft>
-                <a:spcPts val="600"/>
-              </a:spcAft>
-            </a:pPr>
-            <a:r>
-              <a:rPr sz="1500">
-                <a:solidFill>
-                  <a:srgbClr val="22282E"/>
-                </a:solidFill>
-              </a:rPr>
-              <a:t>•  Intenta elevar privilegios: getsystem, y si tiene éxito, vuelca los hashes locales: hashdump.</a:t>
+              <a:t>•  Término — Definición concisa</a:t>
+            </a:r>
+          </a:p>
+          <a:p>
+            <a:pPr>
+              <a:spcAft>
+                <a:spcPts val="600"/>
+              </a:spcAft>
+            </a:pPr>
+            <a:r>
+              <a:rPr sz="1500">
+                <a:solidFill>
+                  <a:srgbClr val="22282E"/>
+                </a:solidFill>
+              </a:rPr>
+              <a:t>•  Post-explotación — Fase que demuestra el alcance real tras obtener acceso</a:t>
+            </a:r>
+          </a:p>
+          <a:p>
+            <a:pPr>
+              <a:spcAft>
+                <a:spcPts val="600"/>
+              </a:spcAft>
+            </a:pPr>
+            <a:r>
+              <a:rPr sz="1500">
+                <a:solidFill>
+                  <a:srgbClr val="22282E"/>
+                </a:solidFill>
+              </a:rPr>
+              <a:t>•  Meterpreter — Payload avanzado que se ejecuta en memoria</a:t>
+            </a:r>
+          </a:p>
+          <a:p>
+            <a:pPr>
+              <a:spcAft>
+                <a:spcPts val="600"/>
+              </a:spcAft>
+            </a:pPr>
+            <a:r>
+              <a:rPr sz="1500">
+                <a:solidFill>
+                  <a:srgbClr val="22282E"/>
+                </a:solidFill>
+              </a:rPr>
+              <a:t>•  Ejecución en memoria — No escribe en disco; reduce la huella forense</a:t>
+            </a:r>
+          </a:p>
+          <a:p>
+            <a:pPr>
+              <a:spcAft>
+                <a:spcPts val="600"/>
+              </a:spcAft>
+            </a:pPr>
+            <a:r>
+              <a:rPr sz="1500">
+                <a:solidFill>
+                  <a:srgbClr val="22282E"/>
+                </a:solidFill>
+              </a:rPr>
+              <a:t>•  migrate — Traslada la sesión a un proceso estable</a:t>
+            </a:r>
+          </a:p>
+          <a:p>
+            <a:pPr>
+              <a:spcAft>
+                <a:spcPts val="600"/>
+              </a:spcAft>
+            </a:pPr>
+            <a:r>
+              <a:rPr sz="1500">
+                <a:solidFill>
+                  <a:srgbClr val="22282E"/>
+                </a:solidFill>
+              </a:rPr>
+              <a:t>•  Estabilidad de sesión — Evitar perder el acceso si el proceso original muere</a:t>
+            </a:r>
+          </a:p>
+          <a:p>
+            <a:pPr>
+              <a:spcAft>
+                <a:spcPts val="600"/>
+              </a:spcAft>
+            </a:pPr>
+            <a:r>
+              <a:rPr sz="1500">
+                <a:solidFill>
+                  <a:srgbClr val="22282E"/>
+                </a:solidFill>
+              </a:rPr>
+              <a:t>•  hashdump — Extrae los hashes de cuentas locales (SAM)</a:t>
             </a:r>
           </a:p>
         </p:txBody>
@@ -4644,7 +5065,7 @@
                   <a:srgbClr val="0B3D2E"/>
                 </a:solidFill>
               </a:rPr>
-              <a:t>✍️ Ejercicios</a:t>
+              <a:t>🧰 Herramientas y preparación</a:t>
             </a:r>
           </a:p>
         </p:txBody>
@@ -4682,97 +5103,37 @@
                   <a:srgbClr val="22282E"/>
                 </a:solidFill>
               </a:rPr>
-              <a:t>•  Explica por qué Meterpreter es considerado más sigiloso que una shell de comandos tradicional.</a:t>
-            </a:r>
-          </a:p>
-          <a:p>
-            <a:pPr>
-              <a:spcAft>
-                <a:spcPts val="600"/>
-              </a:spcAft>
-            </a:pPr>
-            <a:r>
-              <a:rPr sz="1500">
-                <a:solidFill>
-                  <a:srgbClr val="22282E"/>
-                </a:solidFill>
-              </a:rPr>
-              <a:t>•  Migra la sesión a otro proceso y demuestra que sobrevive al cierre del proceso originalmente explotado.</a:t>
-            </a:r>
-          </a:p>
-          <a:p>
-            <a:pPr>
-              <a:spcAft>
-                <a:spcPts val="600"/>
-              </a:spcAft>
-            </a:pPr>
-            <a:r>
-              <a:rPr sz="1500">
-                <a:solidFill>
-                  <a:srgbClr val="22282E"/>
-                </a:solidFill>
-              </a:rPr>
-              <a:t>•  Ejecuta localexploitsuggester y elige una de las rutas de escalada sugeridas, explicando por qué aplicaría en ese sistema.</a:t>
-            </a:r>
-          </a:p>
-          <a:p>
-            <a:pPr>
-              <a:spcAft>
-                <a:spcPts val="600"/>
-              </a:spcAft>
-            </a:pPr>
-            <a:r>
-              <a:rPr sz="1500">
-                <a:solidFill>
-                  <a:srgbClr val="22282E"/>
-                </a:solidFill>
-              </a:rPr>
-              <a:t>•  Descarga un archivo del objetivo con download y verifica su integridad comparándolo en tu máquina Kali.</a:t>
-            </a:r>
-          </a:p>
-          <a:p>
-            <a:pPr>
-              <a:spcAft>
-                <a:spcPts val="600"/>
-              </a:spcAft>
-            </a:pPr>
-            <a:r>
-              <a:rPr sz="1500">
-                <a:solidFill>
-                  <a:srgbClr val="22282E"/>
-                </a:solidFill>
-              </a:rPr>
-              <a:t>•  Explica qué privilegios necesita específicamente hashdump para funcionar y qué ocurre si se ejecuta sin ellos.</a:t>
-            </a:r>
-          </a:p>
-          <a:p>
-            <a:pPr>
-              <a:spcAft>
-                <a:spcPts val="600"/>
-              </a:spcAft>
-            </a:pPr>
-            <a:r>
-              <a:rPr sz="1500">
-                <a:solidFill>
-                  <a:srgbClr val="22282E"/>
-                </a:solidFill>
-              </a:rPr>
-              <a:t>•  Documenta tres artefactos de loot distintos (por ejemplo, hash, archivo de configuración, captura de pantalla) que incluirías como evidencia en un informe real.</a:t>
-            </a:r>
-          </a:p>
-          <a:p>
-            <a:pPr>
-              <a:spcAft>
-                <a:spcPts val="600"/>
-              </a:spcAft>
-            </a:pPr>
-            <a:r>
-              <a:rPr sz="1500">
-                <a:solidFill>
-                  <a:srgbClr val="22282E"/>
-                </a:solidFill>
-              </a:rPr>
-              <a:t>•  Desde la perspectiva de un equipo de respuesta a incidentes, describe qué artefacto forense (proceso inyectado, conexión de red, clave de registro) permitiría detectar una sesión Meterpreter activa en el sistema comprometido.</a:t>
+              <a:t>•  Una sesión de Meterpreter activa, obtenida en la clase anterior contra Metasploitable2/3 o, idealmente, contra una VM Windows de laboratorio propia con un servicio deliberadamente vulnerable (para…</a:t>
+            </a:r>
+          </a:p>
+          <a:p>
+            <a:pPr>
+              <a:spcAft>
+                <a:spcPts val="600"/>
+              </a:spcAft>
+            </a:pPr>
+            <a:r>
+              <a:rPr sz="1500">
+                <a:solidFill>
+                  <a:srgbClr val="22282E"/>
+                </a:solidFill>
+              </a:rPr>
+              <a:t>•  Confirmar que la sesión sigue activa con sessions -l antes de iniciar el laboratorio.</a:t>
+            </a:r>
+          </a:p>
+          <a:p>
+            <a:pPr>
+              <a:spcAft>
+                <a:spcPts val="600"/>
+              </a:spcAft>
+            </a:pPr>
+            <a:r>
+              <a:rPr sz="1500">
+                <a:solidFill>
+                  <a:srgbClr val="22282E"/>
+                </a:solidFill>
+              </a:rPr>
+              <a:t>•  Espacio en disco local (loot/) para almacenar los archivos descargados durante la práctica.</a:t>
             </a:r>
           </a:p>
         </p:txBody>
@@ -4823,7 +5184,7 @@
                   <a:srgbClr val="0B3D2E"/>
                 </a:solidFill>
               </a:rPr>
-              <a:t>📝 Reto verificable</a:t>
+              <a:t>🧪 Laboratorio guiado</a:t>
             </a:r>
           </a:p>
         </p:txBody>
@@ -4861,22 +5222,97 @@
                   <a:srgbClr val="22282E"/>
                 </a:solidFill>
               </a:rPr>
-              <a:t>•  Reto: Desde una sesión Meterpreter activa en el laboratorio propio, recolectar evidencia verificable de impacto: información del sistema, al menos un archivo descargado, y, si el nivel de privilegio obtenido lo permite, un volcado de hashes o credenciales.</a:t>
-            </a:r>
-          </a:p>
-          <a:p>
-            <a:pPr>
-              <a:spcAft>
-                <a:spcPts val="600"/>
-              </a:spcAft>
-            </a:pPr>
-            <a:r>
-              <a:rPr sz="1500">
-                <a:solidFill>
-                  <a:srgbClr val="22282E"/>
-                </a:solidFill>
-              </a:rPr>
-              <a:t>•  Criterio de aceptación: se presenta la salida de sysinfo/getuid del objetivo, un archivo efectivamente descargado a la máquina atacante, y al menos una entrada visible en loot o creds dentro del workspace de Metasploit. Se documenta explícitamente si hubo elevación exitosa con getsystem y, si no la hubo, se explica por qué. Todo el ejercicio se realiza en un entorno propio o autorizado.</a:t>
+              <a:t>•  Con una sesión Meterpreter activa (confirmada con sessions -i 1):</a:t>
+            </a:r>
+          </a:p>
+          <a:p>
+            <a:pPr>
+              <a:spcAft>
+                <a:spcPts val="600"/>
+              </a:spcAft>
+            </a:pPr>
+            <a:r>
+              <a:rPr sz="1500">
+                <a:solidFill>
+                  <a:srgbClr val="22282E"/>
+                </a:solidFill>
+              </a:rPr>
+              <a:t>•  Reconoce el sistema comprometido: sysinfo, getuid, ps.</a:t>
+            </a:r>
+          </a:p>
+          <a:p>
+            <a:pPr>
+              <a:spcAft>
+                <a:spcPts val="600"/>
+              </a:spcAft>
+            </a:pPr>
+            <a:r>
+              <a:rPr sz="1500">
+                <a:solidFill>
+                  <a:srgbClr val="22282E"/>
+                </a:solidFill>
+              </a:rPr>
+              <a:t>•  Explora el sistema de archivos remoto: pwd, ls, y descarga un archivo de interés: download /etc/passwd loot/passwd (o su equivalente en Windows).</a:t>
+            </a:r>
+          </a:p>
+          <a:p>
+            <a:pPr>
+              <a:spcAft>
+                <a:spcPts val="600"/>
+              </a:spcAft>
+            </a:pPr>
+            <a:r>
+              <a:rPr sz="1500">
+                <a:solidFill>
+                  <a:srgbClr val="22282E"/>
+                </a:solidFill>
+              </a:rPr>
+              <a:t>•  Migra la sesión a un proceso más estable para evitar perderla si el servicio original se cierra: migrate -N explorer.exe (Windows) o al PID de un proceso persistente en Linux.</a:t>
+            </a:r>
+          </a:p>
+          <a:p>
+            <a:pPr>
+              <a:spcAft>
+                <a:spcPts val="600"/>
+              </a:spcAft>
+            </a:pPr>
+            <a:r>
+              <a:rPr sz="1500">
+                <a:solidFill>
+                  <a:srgbClr val="22282E"/>
+                </a:solidFill>
+              </a:rPr>
+              <a:t>•  Ejecuta un módulo post de reconocimiento desde msfconsole (con la sesión en background, background primero): run post/multi/recon/localexploitsuggester.</a:t>
+            </a:r>
+          </a:p>
+          <a:p>
+            <a:pPr>
+              <a:spcAft>
+                <a:spcPts val="600"/>
+              </a:spcAft>
+            </a:pPr>
+            <a:r>
+              <a:rPr sz="1500">
+                <a:solidFill>
+                  <a:srgbClr val="22282E"/>
+                </a:solidFill>
+              </a:rPr>
+              <a:t>•  Ejecuta un módulo post de enumeración de usuarios conectados (Windows): run post/windows/gather/enumloggedonusers.</a:t>
+            </a:r>
+          </a:p>
+          <a:p>
+            <a:pPr>
+              <a:spcAft>
+                <a:spcPts val="600"/>
+              </a:spcAft>
+            </a:pPr>
+            <a:r>
+              <a:rPr sz="1500">
+                <a:solidFill>
+                  <a:srgbClr val="22282E"/>
+                </a:solidFill>
+              </a:rPr>
+              <a:t>•  Intenta elevar privilegios: getsystem, y si tiene éxito, vuelca los hashes locales: hashdump.</a:t>
             </a:r>
           </a:p>
         </p:txBody>
